--- a/media/resources/files/Onduktar_Akcha_Bolup_Toloo_menen_MisalKorsot_plVupf4.pptx
+++ b/media/resources/files/Onduktar_Akcha_Bolup_Toloo_menen_MisalKorsot_plVupf4.pptx
@@ -3611,7 +3611,7 @@
                 <a:ea typeface="+mn-ea"/>
                 <a:cs typeface="+mn-cs"/>
               </a:rPr>
-              <a:t>Турдуу пикирлер учун ыраазычылык билдиребиз.</a:t>
+              <a:t>Түрдүү пикирлер үчүн ыраазычылык билдиребиз.</a:t>
             </a:r>
           </a:p>
           <a:p>

--- a/media/resources/files/Onduktar_Akcha_Bolup_Toloo_menen_MisalKorsot_plVupf4.pptx
+++ b/media/resources/files/Onduktar_Akcha_Bolup_Toloo_menen_MisalKorsot_plVupf4.pptx
@@ -4696,7 +4696,7 @@
             </a:r>
             <a:r>
               <a:rPr lang="ru-RU" sz="4400" dirty="0"/>
-              <a:t>ар бир айлык төлөм </a:t>
+              <a:t>ар бир айлык төлөм</a:t>
             </a:r>
             <a:r>
               <a:rPr lang="en-US" sz="4400" dirty="0"/>
